--- a/low-tech/demo-day-prep.pptx
+++ b/low-tech/demo-day-prep.pptx
@@ -4604,6 +4604,66 @@
           </a:graphicData>
         </a:graphic>
       </p:graphicFrame>
+      <p:sp>
+        <p:nvSpPr>
+          <p:cNvPr id="4" name="TextBox 3"/>
+          <p:cNvSpPr txBox="1"/>
+          <p:nvPr/>
+        </p:nvSpPr>
+        <p:spPr>
+          <a:xfrm>
+            <a:off x="457200" y="5029200"/>
+            <a:ext cx="8229600" cy="1645920"/>
+          </a:xfrm>
+          <a:prstGeom prst="rect">
+            <a:avLst/>
+          </a:prstGeom>
+          <a:solidFill>
+            <a:srgbClr val="FFF7ED"/>
+          </a:solidFill>
+          <a:ln w="12700">
+            <a:solidFill>
+              <a:srgbClr val="EA580D"/>
+            </a:solidFill>
+          </a:ln>
+        </p:spPr>
+        <p:txBody>
+          <a:bodyPr wrap="square">
+            <a:spAutoFit/>
+          </a:bodyPr>
+          <a:lstStyle/>
+          <a:p>
+            <a:r>
+              <a:rPr sz="800" b="1">
+                <a:solidFill>
+                  <a:srgbClr val="EA580D"/>
+                </a:solidFill>
+              </a:rPr>
+              <a:t>AI COACH PROMPT</a:t>
+            </a:r>
+          </a:p>
+          <a:p>
+            <a:r>
+              <a:rPr sz="700">
+                <a:solidFill>
+                  <a:srgbClr val="64748B"/>
+                </a:solidFill>
+              </a:rPr>
+              <a:t>Copy the text below and paste it into ChatGPT, Claude, or any AI tool:</a:t>
+            </a:r>
+          </a:p>
+          <a:p>
+            <a:r>
+              <a:rPr sz="700" i="1">
+                <a:solidFill>
+                  <a:srgbClr val="0F172A"/>
+                </a:solidFill>
+              </a:rPr>
+              <a:t>I am preparing a timing structure for my startup [describe your startup]. Help me review my timing breakdown and suggest where I am spending too long or too short. Be specific and actionable. Push back if my answers are vague or unconvincing.</a:t>
+            </a:r>
+          </a:p>
+        </p:txBody>
+      </p:sp>
     </p:spTree>
   </p:cSld>
   <p:clrMapOvr>
@@ -4883,6 +4943,66 @@
                 <a:latin typeface="Calibri"/>
               </a:rPr>
               <a:t>________________________________________</a:t>
+            </a:r>
+          </a:p>
+        </p:txBody>
+      </p:sp>
+      <p:sp>
+        <p:nvSpPr>
+          <p:cNvPr id="4" name="TextBox 3"/>
+          <p:cNvSpPr txBox="1"/>
+          <p:nvPr/>
+        </p:nvSpPr>
+        <p:spPr>
+          <a:xfrm>
+            <a:off x="457200" y="5029200"/>
+            <a:ext cx="8229600" cy="1645920"/>
+          </a:xfrm>
+          <a:prstGeom prst="rect">
+            <a:avLst/>
+          </a:prstGeom>
+          <a:solidFill>
+            <a:srgbClr val="FFF7ED"/>
+          </a:solidFill>
+          <a:ln w="12700">
+            <a:solidFill>
+              <a:srgbClr val="EA580D"/>
+            </a:solidFill>
+          </a:ln>
+        </p:spPr>
+        <p:txBody>
+          <a:bodyPr wrap="square">
+            <a:spAutoFit/>
+          </a:bodyPr>
+          <a:lstStyle/>
+          <a:p>
+            <a:r>
+              <a:rPr sz="800" b="1">
+                <a:solidFill>
+                  <a:srgbClr val="EA580D"/>
+                </a:solidFill>
+              </a:rPr>
+              <a:t>AI COACH PROMPT</a:t>
+            </a:r>
+          </a:p>
+          <a:p>
+            <a:r>
+              <a:rPr sz="700">
+                <a:solidFill>
+                  <a:srgbClr val="64748B"/>
+                </a:solidFill>
+              </a:rPr>
+              <a:t>Copy the text below and paste it into ChatGPT, Claude, or any AI tool:</a:t>
+            </a:r>
+          </a:p>
+          <a:p>
+            <a:r>
+              <a:rPr sz="700" i="1">
+                <a:solidFill>
+                  <a:srgbClr val="0F172A"/>
+                </a:solidFill>
+              </a:rPr>
+              <a:t>I am preparing a hook for my startup [describe your startup]. Help me help me write four versions of my opening hook: a startling statistic, a provocative question, a customer pain story, and a bold claim. Rate each one and tell me which is strongest. Be specific and actionable. Push back if my answers are vague or unconvincing.</a:t>
             </a:r>
           </a:p>
         </p:txBody>
@@ -5101,6 +5221,66 @@
           </a:graphicData>
         </a:graphic>
       </p:graphicFrame>
+      <p:sp>
+        <p:nvSpPr>
+          <p:cNvPr id="4" name="TextBox 3"/>
+          <p:cNvSpPr txBox="1"/>
+          <p:nvPr/>
+        </p:nvSpPr>
+        <p:spPr>
+          <a:xfrm>
+            <a:off x="457200" y="5029200"/>
+            <a:ext cx="8229600" cy="1645920"/>
+          </a:xfrm>
+          <a:prstGeom prst="rect">
+            <a:avLst/>
+          </a:prstGeom>
+          <a:solidFill>
+            <a:srgbClr val="FFF7ED"/>
+          </a:solidFill>
+          <a:ln w="12700">
+            <a:solidFill>
+              <a:srgbClr val="EA580D"/>
+            </a:solidFill>
+          </a:ln>
+        </p:spPr>
+        <p:txBody>
+          <a:bodyPr wrap="square">
+            <a:spAutoFit/>
+          </a:bodyPr>
+          <a:lstStyle/>
+          <a:p>
+            <a:r>
+              <a:rPr sz="800" b="1">
+                <a:solidFill>
+                  <a:srgbClr val="EA580D"/>
+                </a:solidFill>
+              </a:rPr>
+              <a:t>AI COACH PROMPT</a:t>
+            </a:r>
+          </a:p>
+          <a:p>
+            <a:r>
+              <a:rPr sz="700">
+                <a:solidFill>
+                  <a:srgbClr val="64748B"/>
+                </a:solidFill>
+              </a:rPr>
+              <a:t>Copy the text below and paste it into ChatGPT, Claude, or any AI tool:</a:t>
+            </a:r>
+          </a:p>
+          <a:p>
+            <a:r>
+              <a:rPr sz="700" i="1">
+                <a:solidFill>
+                  <a:srgbClr val="0F172A"/>
+                </a:solidFill>
+              </a:rPr>
+              <a:t>I am preparing a Q&amp;A preparation for my startup [describe your startup]. Help me give me the 10 hardest questions an investor would ask about my startup. For each one, help me write a 30-second answer that is honest and confident. Be specific and actionable. Push back if my answers are vague or unconvincing.</a:t>
+            </a:r>
+          </a:p>
+        </p:txBody>
+      </p:sp>
     </p:spTree>
   </p:cSld>
   <p:clrMapOvr>
@@ -5336,6 +5516,66 @@
           </a:p>
         </p:txBody>
       </p:sp>
+      <p:sp>
+        <p:nvSpPr>
+          <p:cNvPr id="4" name="TextBox 3"/>
+          <p:cNvSpPr txBox="1"/>
+          <p:nvPr/>
+        </p:nvSpPr>
+        <p:spPr>
+          <a:xfrm>
+            <a:off x="457200" y="5029200"/>
+            <a:ext cx="8229600" cy="1645920"/>
+          </a:xfrm>
+          <a:prstGeom prst="rect">
+            <a:avLst/>
+          </a:prstGeom>
+          <a:solidFill>
+            <a:srgbClr val="FFF7ED"/>
+          </a:solidFill>
+          <a:ln w="12700">
+            <a:solidFill>
+              <a:srgbClr val="EA580D"/>
+            </a:solidFill>
+          </a:ln>
+        </p:spPr>
+        <p:txBody>
+          <a:bodyPr wrap="square">
+            <a:spAutoFit/>
+          </a:bodyPr>
+          <a:lstStyle/>
+          <a:p>
+            <a:r>
+              <a:rPr sz="800" b="1">
+                <a:solidFill>
+                  <a:srgbClr val="EA580D"/>
+                </a:solidFill>
+              </a:rPr>
+              <a:t>AI COACH PROMPT</a:t>
+            </a:r>
+          </a:p>
+          <a:p>
+            <a:r>
+              <a:rPr sz="700">
+                <a:solidFill>
+                  <a:srgbClr val="64748B"/>
+                </a:solidFill>
+              </a:rPr>
+              <a:t>Copy the text below and paste it into ChatGPT, Claude, or any AI tool:</a:t>
+            </a:r>
+          </a:p>
+          <a:p>
+            <a:r>
+              <a:rPr sz="700" i="1">
+                <a:solidFill>
+                  <a:srgbClr val="0F172A"/>
+                </a:solidFill>
+              </a:rPr>
+              <a:t>I am preparing a pitch review for my startup [describe your startup]. Help me review my pitch for these common mistakes and tell me honestly where I am falling into any of these traps. Be specific and actionable. Push back if my answers are vague or unconvincing.</a:t>
+            </a:r>
+          </a:p>
+        </p:txBody>
+      </p:sp>
     </p:spTree>
   </p:cSld>
   <p:clrMapOvr>
@@ -5611,6 +5851,66 @@
           </a:p>
         </p:txBody>
       </p:sp>
+      <p:sp>
+        <p:nvSpPr>
+          <p:cNvPr id="4" name="TextBox 3"/>
+          <p:cNvSpPr txBox="1"/>
+          <p:nvPr/>
+        </p:nvSpPr>
+        <p:spPr>
+          <a:xfrm>
+            <a:off x="457200" y="5029200"/>
+            <a:ext cx="8229600" cy="1645920"/>
+          </a:xfrm>
+          <a:prstGeom prst="rect">
+            <a:avLst/>
+          </a:prstGeom>
+          <a:solidFill>
+            <a:srgbClr val="FFF7ED"/>
+          </a:solidFill>
+          <a:ln w="12700">
+            <a:solidFill>
+              <a:srgbClr val="EA580D"/>
+            </a:solidFill>
+          </a:ln>
+        </p:spPr>
+        <p:txBody>
+          <a:bodyPr wrap="square">
+            <a:spAutoFit/>
+          </a:bodyPr>
+          <a:lstStyle/>
+          <a:p>
+            <a:r>
+              <a:rPr sz="800" b="1">
+                <a:solidFill>
+                  <a:srgbClr val="EA580D"/>
+                </a:solidFill>
+              </a:rPr>
+              <a:t>AI COACH PROMPT</a:t>
+            </a:r>
+          </a:p>
+          <a:p>
+            <a:r>
+              <a:rPr sz="700">
+                <a:solidFill>
+                  <a:srgbClr val="64748B"/>
+                </a:solidFill>
+              </a:rPr>
+              <a:t>Copy the text below and paste it into ChatGPT, Claude, or any AI tool:</a:t>
+            </a:r>
+          </a:p>
+          <a:p>
+            <a:r>
+              <a:rPr sz="700" i="1">
+                <a:solidFill>
+                  <a:srgbClr val="0F172A"/>
+                </a:solidFill>
+              </a:rPr>
+              <a:t>I am preparing a delivery for my startup [describe your startup]. Help me act as a pitch coach and give me feedback on my delivery based on these criteria. Be specific and actionable. Push back if my answers are vague or unconvincing.</a:t>
+            </a:r>
+          </a:p>
+        </p:txBody>
+      </p:sp>
     </p:spTree>
   </p:cSld>
   <p:clrMapOvr>
@@ -5794,6 +6094,66 @@
                 <a:latin typeface="Calibri"/>
               </a:rPr>
               <a:t>7. Do a final run-through at half speed. Focus on transitions between slides.</a:t>
+            </a:r>
+          </a:p>
+        </p:txBody>
+      </p:sp>
+      <p:sp>
+        <p:nvSpPr>
+          <p:cNvPr id="4" name="TextBox 3"/>
+          <p:cNvSpPr txBox="1"/>
+          <p:nvPr/>
+        </p:nvSpPr>
+        <p:spPr>
+          <a:xfrm>
+            <a:off x="457200" y="5029200"/>
+            <a:ext cx="8229600" cy="1645920"/>
+          </a:xfrm>
+          <a:prstGeom prst="rect">
+            <a:avLst/>
+          </a:prstGeom>
+          <a:solidFill>
+            <a:srgbClr val="FFF7ED"/>
+          </a:solidFill>
+          <a:ln w="12700">
+            <a:solidFill>
+              <a:srgbClr val="EA580D"/>
+            </a:solidFill>
+          </a:ln>
+        </p:spPr>
+        <p:txBody>
+          <a:bodyPr wrap="square">
+            <a:spAutoFit/>
+          </a:bodyPr>
+          <a:lstStyle/>
+          <a:p>
+            <a:r>
+              <a:rPr sz="800" b="1">
+                <a:solidFill>
+                  <a:srgbClr val="EA580D"/>
+                </a:solidFill>
+              </a:rPr>
+              <a:t>AI COACH PROMPT</a:t>
+            </a:r>
+          </a:p>
+          <a:p>
+            <a:r>
+              <a:rPr sz="700">
+                <a:solidFill>
+                  <a:srgbClr val="64748B"/>
+                </a:solidFill>
+              </a:rPr>
+              <a:t>Copy the text below and paste it into ChatGPT, Claude, or any AI tool:</a:t>
+            </a:r>
+          </a:p>
+          <a:p>
+            <a:r>
+              <a:rPr sz="700" i="1">
+                <a:solidFill>
+                  <a:srgbClr val="0F172A"/>
+                </a:solidFill>
+              </a:rPr>
+              <a:t>I am preparing a day-of preparation for my startup [describe your startup]. Help me help me create a personalised checklist for my demo day based on my specific setup and presentation needs. Be specific and actionable. Push back if my answers are vague or unconvincing.</a:t>
             </a:r>
           </a:p>
         </p:txBody>

--- a/low-tech/demo-day-prep.pptx
+++ b/low-tech/demo-day-prep.pptx
@@ -3947,6 +3947,39 @@
                 <a:latin typeface="Calibri"/>
               </a:rPr>
               <a:t>From Deck to Stage</a:t>
+            </a:r>
+          </a:p>
+        </p:txBody>
+      </p:sp>
+      <p:sp>
+        <p:nvSpPr>
+          <p:cNvPr id="3" name="TextBox 2"/>
+          <p:cNvSpPr txBox="1"/>
+          <p:nvPr/>
+        </p:nvSpPr>
+        <p:spPr>
+          <a:xfrm>
+            <a:off x="457200" y="5760720"/>
+            <a:ext cx="8229600" cy="457200"/>
+          </a:xfrm>
+          <a:prstGeom prst="rect">
+            <a:avLst/>
+          </a:prstGeom>
+          <a:noFill/>
+        </p:spPr>
+        <p:txBody>
+          <a:bodyPr wrap="square">
+            <a:spAutoFit/>
+          </a:bodyPr>
+          <a:lstStyle/>
+          <a:p>
+            <a:r>
+              <a:rPr sz="900" b="0">
+                <a:solidFill>
+                  <a:srgbClr val="EA580D"/>
+                </a:solidFill>
+              </a:rPr>
+              <a:t>Want AI coaching? Open AI-PROMPTS.md, copy the prompt for this exercise, and paste it into ChatGPT or Claude.</a:t>
             </a:r>
           </a:p>
         </p:txBody>
@@ -4604,66 +4637,6 @@
           </a:graphicData>
         </a:graphic>
       </p:graphicFrame>
-      <p:sp>
-        <p:nvSpPr>
-          <p:cNvPr id="4" name="TextBox 3"/>
-          <p:cNvSpPr txBox="1"/>
-          <p:nvPr/>
-        </p:nvSpPr>
-        <p:spPr>
-          <a:xfrm>
-            <a:off x="457200" y="5029200"/>
-            <a:ext cx="8229600" cy="1645920"/>
-          </a:xfrm>
-          <a:prstGeom prst="rect">
-            <a:avLst/>
-          </a:prstGeom>
-          <a:solidFill>
-            <a:srgbClr val="FFF7ED"/>
-          </a:solidFill>
-          <a:ln w="12700">
-            <a:solidFill>
-              <a:srgbClr val="EA580D"/>
-            </a:solidFill>
-          </a:ln>
-        </p:spPr>
-        <p:txBody>
-          <a:bodyPr wrap="square">
-            <a:spAutoFit/>
-          </a:bodyPr>
-          <a:lstStyle/>
-          <a:p>
-            <a:r>
-              <a:rPr sz="800" b="1">
-                <a:solidFill>
-                  <a:srgbClr val="EA580D"/>
-                </a:solidFill>
-              </a:rPr>
-              <a:t>AI COACH PROMPT</a:t>
-            </a:r>
-          </a:p>
-          <a:p>
-            <a:r>
-              <a:rPr sz="700">
-                <a:solidFill>
-                  <a:srgbClr val="64748B"/>
-                </a:solidFill>
-              </a:rPr>
-              <a:t>Copy the text below and paste it into ChatGPT, Claude, or any AI tool:</a:t>
-            </a:r>
-          </a:p>
-          <a:p>
-            <a:r>
-              <a:rPr sz="700" i="1">
-                <a:solidFill>
-                  <a:srgbClr val="0F172A"/>
-                </a:solidFill>
-              </a:rPr>
-              <a:t>I am preparing a timing structure for my startup [describe your startup]. Help me review my timing breakdown and suggest where I am spending too long or too short. Be specific and actionable. Push back if my answers are vague or unconvincing.</a:t>
-            </a:r>
-          </a:p>
-        </p:txBody>
-      </p:sp>
     </p:spTree>
   </p:cSld>
   <p:clrMapOvr>
@@ -4943,66 +4916,6 @@
                 <a:latin typeface="Calibri"/>
               </a:rPr>
               <a:t>________________________________________</a:t>
-            </a:r>
-          </a:p>
-        </p:txBody>
-      </p:sp>
-      <p:sp>
-        <p:nvSpPr>
-          <p:cNvPr id="4" name="TextBox 3"/>
-          <p:cNvSpPr txBox="1"/>
-          <p:nvPr/>
-        </p:nvSpPr>
-        <p:spPr>
-          <a:xfrm>
-            <a:off x="457200" y="5029200"/>
-            <a:ext cx="8229600" cy="1645920"/>
-          </a:xfrm>
-          <a:prstGeom prst="rect">
-            <a:avLst/>
-          </a:prstGeom>
-          <a:solidFill>
-            <a:srgbClr val="FFF7ED"/>
-          </a:solidFill>
-          <a:ln w="12700">
-            <a:solidFill>
-              <a:srgbClr val="EA580D"/>
-            </a:solidFill>
-          </a:ln>
-        </p:spPr>
-        <p:txBody>
-          <a:bodyPr wrap="square">
-            <a:spAutoFit/>
-          </a:bodyPr>
-          <a:lstStyle/>
-          <a:p>
-            <a:r>
-              <a:rPr sz="800" b="1">
-                <a:solidFill>
-                  <a:srgbClr val="EA580D"/>
-                </a:solidFill>
-              </a:rPr>
-              <a:t>AI COACH PROMPT</a:t>
-            </a:r>
-          </a:p>
-          <a:p>
-            <a:r>
-              <a:rPr sz="700">
-                <a:solidFill>
-                  <a:srgbClr val="64748B"/>
-                </a:solidFill>
-              </a:rPr>
-              <a:t>Copy the text below and paste it into ChatGPT, Claude, or any AI tool:</a:t>
-            </a:r>
-          </a:p>
-          <a:p>
-            <a:r>
-              <a:rPr sz="700" i="1">
-                <a:solidFill>
-                  <a:srgbClr val="0F172A"/>
-                </a:solidFill>
-              </a:rPr>
-              <a:t>I am preparing a hook for my startup [describe your startup]. Help me help me write four versions of my opening hook: a startling statistic, a provocative question, a customer pain story, and a bold claim. Rate each one and tell me which is strongest. Be specific and actionable. Push back if my answers are vague or unconvincing.</a:t>
             </a:r>
           </a:p>
         </p:txBody>
@@ -5221,66 +5134,6 @@
           </a:graphicData>
         </a:graphic>
       </p:graphicFrame>
-      <p:sp>
-        <p:nvSpPr>
-          <p:cNvPr id="4" name="TextBox 3"/>
-          <p:cNvSpPr txBox="1"/>
-          <p:nvPr/>
-        </p:nvSpPr>
-        <p:spPr>
-          <a:xfrm>
-            <a:off x="457200" y="5029200"/>
-            <a:ext cx="8229600" cy="1645920"/>
-          </a:xfrm>
-          <a:prstGeom prst="rect">
-            <a:avLst/>
-          </a:prstGeom>
-          <a:solidFill>
-            <a:srgbClr val="FFF7ED"/>
-          </a:solidFill>
-          <a:ln w="12700">
-            <a:solidFill>
-              <a:srgbClr val="EA580D"/>
-            </a:solidFill>
-          </a:ln>
-        </p:spPr>
-        <p:txBody>
-          <a:bodyPr wrap="square">
-            <a:spAutoFit/>
-          </a:bodyPr>
-          <a:lstStyle/>
-          <a:p>
-            <a:r>
-              <a:rPr sz="800" b="1">
-                <a:solidFill>
-                  <a:srgbClr val="EA580D"/>
-                </a:solidFill>
-              </a:rPr>
-              <a:t>AI COACH PROMPT</a:t>
-            </a:r>
-          </a:p>
-          <a:p>
-            <a:r>
-              <a:rPr sz="700">
-                <a:solidFill>
-                  <a:srgbClr val="64748B"/>
-                </a:solidFill>
-              </a:rPr>
-              <a:t>Copy the text below and paste it into ChatGPT, Claude, or any AI tool:</a:t>
-            </a:r>
-          </a:p>
-          <a:p>
-            <a:r>
-              <a:rPr sz="700" i="1">
-                <a:solidFill>
-                  <a:srgbClr val="0F172A"/>
-                </a:solidFill>
-              </a:rPr>
-              <a:t>I am preparing a Q&amp;A preparation for my startup [describe your startup]. Help me give me the 10 hardest questions an investor would ask about my startup. For each one, help me write a 30-second answer that is honest and confident. Be specific and actionable. Push back if my answers are vague or unconvincing.</a:t>
-            </a:r>
-          </a:p>
-        </p:txBody>
-      </p:sp>
     </p:spTree>
   </p:cSld>
   <p:clrMapOvr>
@@ -5516,66 +5369,6 @@
           </a:p>
         </p:txBody>
       </p:sp>
-      <p:sp>
-        <p:nvSpPr>
-          <p:cNvPr id="4" name="TextBox 3"/>
-          <p:cNvSpPr txBox="1"/>
-          <p:nvPr/>
-        </p:nvSpPr>
-        <p:spPr>
-          <a:xfrm>
-            <a:off x="457200" y="5029200"/>
-            <a:ext cx="8229600" cy="1645920"/>
-          </a:xfrm>
-          <a:prstGeom prst="rect">
-            <a:avLst/>
-          </a:prstGeom>
-          <a:solidFill>
-            <a:srgbClr val="FFF7ED"/>
-          </a:solidFill>
-          <a:ln w="12700">
-            <a:solidFill>
-              <a:srgbClr val="EA580D"/>
-            </a:solidFill>
-          </a:ln>
-        </p:spPr>
-        <p:txBody>
-          <a:bodyPr wrap="square">
-            <a:spAutoFit/>
-          </a:bodyPr>
-          <a:lstStyle/>
-          <a:p>
-            <a:r>
-              <a:rPr sz="800" b="1">
-                <a:solidFill>
-                  <a:srgbClr val="EA580D"/>
-                </a:solidFill>
-              </a:rPr>
-              <a:t>AI COACH PROMPT</a:t>
-            </a:r>
-          </a:p>
-          <a:p>
-            <a:r>
-              <a:rPr sz="700">
-                <a:solidFill>
-                  <a:srgbClr val="64748B"/>
-                </a:solidFill>
-              </a:rPr>
-              <a:t>Copy the text below and paste it into ChatGPT, Claude, or any AI tool:</a:t>
-            </a:r>
-          </a:p>
-          <a:p>
-            <a:r>
-              <a:rPr sz="700" i="1">
-                <a:solidFill>
-                  <a:srgbClr val="0F172A"/>
-                </a:solidFill>
-              </a:rPr>
-              <a:t>I am preparing a pitch review for my startup [describe your startup]. Help me review my pitch for these common mistakes and tell me honestly where I am falling into any of these traps. Be specific and actionable. Push back if my answers are vague or unconvincing.</a:t>
-            </a:r>
-          </a:p>
-        </p:txBody>
-      </p:sp>
     </p:spTree>
   </p:cSld>
   <p:clrMapOvr>
@@ -5851,66 +5644,6 @@
           </a:p>
         </p:txBody>
       </p:sp>
-      <p:sp>
-        <p:nvSpPr>
-          <p:cNvPr id="4" name="TextBox 3"/>
-          <p:cNvSpPr txBox="1"/>
-          <p:nvPr/>
-        </p:nvSpPr>
-        <p:spPr>
-          <a:xfrm>
-            <a:off x="457200" y="5029200"/>
-            <a:ext cx="8229600" cy="1645920"/>
-          </a:xfrm>
-          <a:prstGeom prst="rect">
-            <a:avLst/>
-          </a:prstGeom>
-          <a:solidFill>
-            <a:srgbClr val="FFF7ED"/>
-          </a:solidFill>
-          <a:ln w="12700">
-            <a:solidFill>
-              <a:srgbClr val="EA580D"/>
-            </a:solidFill>
-          </a:ln>
-        </p:spPr>
-        <p:txBody>
-          <a:bodyPr wrap="square">
-            <a:spAutoFit/>
-          </a:bodyPr>
-          <a:lstStyle/>
-          <a:p>
-            <a:r>
-              <a:rPr sz="800" b="1">
-                <a:solidFill>
-                  <a:srgbClr val="EA580D"/>
-                </a:solidFill>
-              </a:rPr>
-              <a:t>AI COACH PROMPT</a:t>
-            </a:r>
-          </a:p>
-          <a:p>
-            <a:r>
-              <a:rPr sz="700">
-                <a:solidFill>
-                  <a:srgbClr val="64748B"/>
-                </a:solidFill>
-              </a:rPr>
-              <a:t>Copy the text below and paste it into ChatGPT, Claude, or any AI tool:</a:t>
-            </a:r>
-          </a:p>
-          <a:p>
-            <a:r>
-              <a:rPr sz="700" i="1">
-                <a:solidFill>
-                  <a:srgbClr val="0F172A"/>
-                </a:solidFill>
-              </a:rPr>
-              <a:t>I am preparing a delivery for my startup [describe your startup]. Help me act as a pitch coach and give me feedback on my delivery based on these criteria. Be specific and actionable. Push back if my answers are vague or unconvincing.</a:t>
-            </a:r>
-          </a:p>
-        </p:txBody>
-      </p:sp>
     </p:spTree>
   </p:cSld>
   <p:clrMapOvr>
@@ -6094,66 +5827,6 @@
                 <a:latin typeface="Calibri"/>
               </a:rPr>
               <a:t>7. Do a final run-through at half speed. Focus on transitions between slides.</a:t>
-            </a:r>
-          </a:p>
-        </p:txBody>
-      </p:sp>
-      <p:sp>
-        <p:nvSpPr>
-          <p:cNvPr id="4" name="TextBox 3"/>
-          <p:cNvSpPr txBox="1"/>
-          <p:nvPr/>
-        </p:nvSpPr>
-        <p:spPr>
-          <a:xfrm>
-            <a:off x="457200" y="5029200"/>
-            <a:ext cx="8229600" cy="1645920"/>
-          </a:xfrm>
-          <a:prstGeom prst="rect">
-            <a:avLst/>
-          </a:prstGeom>
-          <a:solidFill>
-            <a:srgbClr val="FFF7ED"/>
-          </a:solidFill>
-          <a:ln w="12700">
-            <a:solidFill>
-              <a:srgbClr val="EA580D"/>
-            </a:solidFill>
-          </a:ln>
-        </p:spPr>
-        <p:txBody>
-          <a:bodyPr wrap="square">
-            <a:spAutoFit/>
-          </a:bodyPr>
-          <a:lstStyle/>
-          <a:p>
-            <a:r>
-              <a:rPr sz="800" b="1">
-                <a:solidFill>
-                  <a:srgbClr val="EA580D"/>
-                </a:solidFill>
-              </a:rPr>
-              <a:t>AI COACH PROMPT</a:t>
-            </a:r>
-          </a:p>
-          <a:p>
-            <a:r>
-              <a:rPr sz="700">
-                <a:solidFill>
-                  <a:srgbClr val="64748B"/>
-                </a:solidFill>
-              </a:rPr>
-              <a:t>Copy the text below and paste it into ChatGPT, Claude, or any AI tool:</a:t>
-            </a:r>
-          </a:p>
-          <a:p>
-            <a:r>
-              <a:rPr sz="700" i="1">
-                <a:solidFill>
-                  <a:srgbClr val="0F172A"/>
-                </a:solidFill>
-              </a:rPr>
-              <a:t>I am preparing a day-of preparation for my startup [describe your startup]. Help me help me create a personalised checklist for my demo day based on my specific setup and presentation needs. Be specific and actionable. Push back if my answers are vague or unconvincing.</a:t>
             </a:r>
           </a:p>
         </p:txBody>
